--- a/DBTUNING/ch02_SQL실행원리/ch02_교안.pptx
+++ b/DBTUNING/ch02_SQL실행원리/ch02_교안.pptx
@@ -540,7 +540,7 @@
           <a:lstStyle/>
           <a:p>
             <a:r>
-              <a:t>제2장은 앞 장에서 세운 판단 기준 위에 SQL이 실제로 어떻게 처리되는지를 얹는 장이다. 실행계획 읽기만 반복하면 개별 문장은 설명할 수 있어도 서버 전체가 파싱으로 느려지는 상황은 진단하지 못한다. 이 장이 그 빈 자리를 채운다. 첫 시간에 던질 질문은 하나면 충분하다. 같은 SQL을 두 번 실행하면 오라클은 두 번 다 고민할까, 아니면 한 번만 고민하고 두 번째는 기억을 꺼내 쓸까. 학습자가 스스로 답을 만들어 보게 한 뒤 본문으로 들어가면 네 단계 설명이 훨씬 잘 붙는다. 강의 첫머리에서 이 장이 실행계획 읽기가 아니라 그 계획이 생기는 과정을 다룬다는 점을 분명히 해 둔다.</a:t>
+              <a:t>제ch02은 앞 장에서 세운 판단 기준 위에 SQL이 실제로 어떻게 처리되는지를 얹는 장이다. 실행계획 읽기만 반복하면 개별 문장은 설명할 수 있어도 서버 전체가 파싱으로 느려지는 상황은 진단하지 못한다. 이 장이 그 빈 자리를 채운다. 첫 시간에 던질 질문은 하나면 충분하다. 같은 SQL을 두 번 실행하면 오라클은 두 번 다 고민할까, 아니면 한 번만 고민하고 두 번째는 기억을 꺼내 쓸까. 학습자가 스스로 답을 만들어 보게 한 뒤 본문으로 들어가면 네 단계 설명이 훨씬 잘 붙는다. 강의 첫머리에서 이 장이 실행계획 읽기가 아니라 그 계획이 생기는 과정을 다룬다는 점을 분명히 해 둔다.</a:t>
             </a:r>
           </a:p>
         </p:txBody>
@@ -6287,7 +6287,7 @@
                 </a:solidFill>
                 <a:latin typeface="Malgun Gothic"/>
               </a:rPr>
-              <a:t>Oracle SQL 튜닝 과정  ·  제2장</a:t>
+              <a:t>Oracle SQL 튜닝 과정  ·  제ch02</a:t>
             </a:r>
           </a:p>
         </p:txBody>
@@ -10877,7 +10877,7 @@
                 </a:solidFill>
                 <a:latin typeface="Malgun Gothic"/>
               </a:rPr>
-              <a:t>    –  히스토그램의 내부 원리는 Chapter 13에서 다룬다</a:t>
+              <a:t>    –  히스토그램의 내부 원리는 ch08에서 다룬다</a:t>
             </a:r>
           </a:p>
           <a:p>
@@ -11125,7 +11125,7 @@
                 </a:solidFill>
                 <a:latin typeface="Malgun Gothic"/>
               </a:rPr>
-              <a:t>•  인덱스를 도입하면 이 상황이 어떻게 달라지는지는 Chapter 5에서 확인한다</a:t>
+              <a:t>•  인덱스를 도입하면 이 상황이 어떻게 달라지는지는 ch06에서 확인한다</a:t>
             </a:r>
           </a:p>
         </p:txBody>
@@ -13622,7 +13622,7 @@
                 </a:solidFill>
                 <a:latin typeface="Malgun Gothic"/>
               </a:rPr>
-              <a:t>바인드 변수 Peeking과 그 대응 방법(적응형 커서 공유)은 Chapter 13에서 다룬다.</a:t>
+              <a:t>바인드 변수 Peeking과 그 대응 방법(적응형 커서 공유)은 ch08에서 다룬다.</a:t>
             </a:r>
           </a:p>
         </p:txBody>
@@ -13837,7 +13837,7 @@
                 </a:solidFill>
                 <a:latin typeface="Malgun Gothic"/>
               </a:rPr>
-              <a:t>•  바인드 변수도 만능은 아니다 — Peeking 부작용은 Chapter 13에서 다룬다</a:t>
+              <a:t>•  바인드 변수도 만능은 아니다 — Peeking 부작용은 ch08에서 다룬다</a:t>
             </a:r>
           </a:p>
         </p:txBody>
@@ -13975,7 +13975,7 @@
                 </a:solidFill>
                 <a:latin typeface="Malgun Gothic"/>
               </a:rPr>
-              <a:t>•  실습문제 10문항 — SQL튜닝_Ch02_문제.md</a:t>
+              <a:t>•  실습문제 10문항 — ch02_문제.md</a:t>
             </a:r>
           </a:p>
           <a:p>
@@ -14698,7 +14698,7 @@
                 </a:solidFill>
                 <a:latin typeface="Malgun Gothic"/>
               </a:rPr>
-              <a:t>    –  히스토그램의 내부 원리와 바인드 변수 대응 기법 — Chapter 13</a:t>
+              <a:t>    –  히스토그램의 내부 원리와 바인드 변수 대응 기법 — ch08</a:t>
             </a:r>
           </a:p>
           <a:p>

--- a/DBTUNING/ch02_SQL실행원리/ch02_교안.pptx
+++ b/DBTUNING/ch02_SQL실행원리/ch02_교안.pptx
@@ -540,7 +540,7 @@
           <a:lstStyle/>
           <a:p>
             <a:r>
-              <a:t>제ch02은 앞 장에서 세운 판단 기준 위에 SQL이 실제로 어떻게 처리되는지를 얹는 장이다. 실행계획 읽기만 반복하면 개별 문장은 설명할 수 있어도 서버 전체가 파싱으로 느려지는 상황은 진단하지 못한다. 이 장이 그 빈 자리를 채운다. 첫 시간에 던질 질문은 하나면 충분하다. 같은 SQL을 두 번 실행하면 오라클은 두 번 다 고민할까, 아니면 한 번만 고민하고 두 번째는 기억을 꺼내 쓸까. 학습자가 스스로 답을 만들어 보게 한 뒤 본문으로 들어가면 네 단계 설명이 훨씬 잘 붙는다. 강의 첫머리에서 이 장이 실행계획 읽기가 아니라 그 계획이 생기는 과정을 다룬다는 점을 분명히 해 둔다.</a:t>
+              <a:t>ch02은 앞 장에서 세운 판단 기준 위에 SQL이 실제로 어떻게 처리되는지를 얹는 장이다. 실행계획 읽기만 반복하면 개별 문장은 설명할 수 있어도 서버 전체가 파싱으로 느려지는 상황은 진단하지 못한다. 이 장이 그 빈 자리를 채운다. 첫 시간에 던질 질문은 하나면 충분하다. 같은 SQL을 두 번 실행하면 오라클은 두 번 다 고민할까, 아니면 한 번만 고민하고 두 번째는 기억을 꺼내 쓸까. 학습자가 스스로 답을 만들어 보게 한 뒤 본문으로 들어가면 네 단계 설명이 훨씬 잘 붙는다. 강의 첫머리에서 이 장이 실행계획 읽기가 아니라 그 계획이 생기는 과정을 다룬다는 점을 분명히 해 둔다.</a:t>
             </a:r>
           </a:p>
         </p:txBody>
@@ -6287,7 +6287,7 @@
                 </a:solidFill>
                 <a:latin typeface="Malgun Gothic"/>
               </a:rPr>
-              <a:t>Oracle SQL 튜닝 과정  ·  제ch02</a:t>
+              <a:t>Oracle SQL 튜닝 과정  ·  ch02</a:t>
             </a:r>
           </a:p>
         </p:txBody>
